--- a/metro/metro-f01-just-listed.pptx
+++ b/metro/metro-f01-just-listed.pptx
@@ -3602,9 +3602,9 @@
                 <a:solidFill>
                   <a:srgbClr val="FFFFFF"/>
                 </a:solidFill>
-                <a:latin typeface="Space Grotesk"/>
-                <a:ea typeface="Space Grotesk"/>
-                <a:cs typeface="Space Grotesk"/>
+                <a:latin typeface="HK Grotesk"/>
+                <a:ea typeface="HK Grotesk"/>
+                <a:cs typeface="HK Grotesk"/>
               </a:rPr>
               <a:t>NO</a:t>
             </a:r>
@@ -3641,9 +3641,9 @@
                 <a:solidFill>
                   <a:srgbClr val="FFFFFF"/>
                 </a:solidFill>
-                <a:latin typeface="Space Grotesk"/>
-                <a:ea typeface="Space Grotesk"/>
-                <a:cs typeface="Space Grotesk"/>
+                <a:latin typeface="HK Grotesk"/>
+                <a:ea typeface="HK Grotesk"/>
+                <a:cs typeface="HK Grotesk"/>
               </a:rPr>
               <a:t>North &amp; Oak</a:t>
             </a:r>
@@ -3785,9 +3785,9 @@
                 <a:solidFill>
                   <a:srgbClr val="FFFFFF"/>
                 </a:solidFill>
-                <a:latin typeface="Space Grotesk"/>
-                <a:ea typeface="Space Grotesk"/>
-                <a:cs typeface="Space Grotesk"/>
+                <a:latin typeface="HK Grotesk"/>
+                <a:ea typeface="HK Grotesk"/>
+                <a:cs typeface="HK Grotesk"/>
               </a:rPr>
               <a:t>1200 N Wells, 14C</a:t>
             </a:r>
@@ -3855,9 +3855,9 @@
                 <a:solidFill>
                   <a:srgbClr val="2D5BE3"/>
                 </a:solidFill>
-                <a:latin typeface="Space Grotesk"/>
-                <a:ea typeface="Space Grotesk"/>
-                <a:cs typeface="Space Grotesk"/>
+                <a:latin typeface="HK Grotesk"/>
+                <a:ea typeface="HK Grotesk"/>
+                <a:cs typeface="HK Grotesk"/>
               </a:rPr>
               <a:t>$895,000</a:t>
             </a:r>
@@ -3890,9 +3890,9 @@
                 <a:solidFill>
                   <a:srgbClr val="FFFFFF"/>
                 </a:solidFill>
-                <a:latin typeface="Space Grotesk"/>
-                <a:ea typeface="Space Grotesk"/>
-                <a:cs typeface="Space Grotesk"/>
+                <a:latin typeface="HK Grotesk"/>
+                <a:ea typeface="HK Grotesk"/>
+                <a:cs typeface="HK Grotesk"/>
               </a:rPr>
               <a:t>2 BD · 2 BA · 1,480 SF</a:t>
             </a:r>
@@ -3925,9 +3925,9 @@
                 <a:solidFill>
                   <a:srgbClr val="959698"/>
                 </a:solidFill>
-                <a:latin typeface="Space Grotesk"/>
-                <a:ea typeface="Space Grotesk"/>
-                <a:cs typeface="Space Grotesk"/>
+                <a:latin typeface="HK Grotesk"/>
+                <a:ea typeface="HK Grotesk"/>
+                <a:cs typeface="HK Grotesk"/>
               </a:rPr>
               <a:t>Beds · Baths · Square footage</a:t>
             </a:r>
@@ -3960,9 +3960,9 @@
                 <a:solidFill>
                   <a:srgbClr val="FFFFFF"/>
                 </a:solidFill>
-                <a:latin typeface="Space Grotesk"/>
-                <a:ea typeface="Space Grotesk"/>
-                <a:cs typeface="Space Grotesk"/>
+                <a:latin typeface="HK Grotesk"/>
+                <a:ea typeface="HK Grotesk"/>
+                <a:cs typeface="HK Grotesk"/>
               </a:rPr>
               <a:t>Chef’s Kitchen</a:t>
             </a:r>
@@ -3995,9 +3995,9 @@
                 <a:solidFill>
                   <a:srgbClr val="959698"/>
                 </a:solidFill>
-                <a:latin typeface="Space Grotesk"/>
-                <a:ea typeface="Space Grotesk"/>
-                <a:cs typeface="Space Grotesk"/>
+                <a:latin typeface="HK Grotesk"/>
+                <a:ea typeface="HK Grotesk"/>
+                <a:cs typeface="HK Grotesk"/>
               </a:rPr>
               <a:t>Quartz island · integrated Bosch</a:t>
             </a:r>
@@ -4030,9 +4030,9 @@
                 <a:solidFill>
                   <a:srgbClr val="FFFFFF"/>
                 </a:solidFill>
-                <a:latin typeface="Space Grotesk"/>
-                <a:ea typeface="Space Grotesk"/>
-                <a:cs typeface="Space Grotesk"/>
+                <a:latin typeface="HK Grotesk"/>
+                <a:ea typeface="HK Grotesk"/>
+                <a:cs typeface="HK Grotesk"/>
               </a:rPr>
               <a:t>Private Balcony</a:t>
             </a:r>
@@ -4065,9 +4065,9 @@
                 <a:solidFill>
                   <a:srgbClr val="959698"/>
                 </a:solidFill>
-                <a:latin typeface="Space Grotesk"/>
-                <a:ea typeface="Space Grotesk"/>
-                <a:cs typeface="Space Grotesk"/>
+                <a:latin typeface="HK Grotesk"/>
+                <a:ea typeface="HK Grotesk"/>
+                <a:cs typeface="HK Grotesk"/>
               </a:rPr>
               <a:t>South-facing · skyline views</a:t>
             </a:r>
